--- a/exports/pptx/lessons/middle-module-06-moon-phases-tithi/day-03-fifteen-tithis.pptx
+++ b/exports/pptx/lessons/middle-module-06-moon-phases-tithi/day-03-fifteen-tithis.pptx
@@ -5515,7 +5515,1377 @@
         </p:nvSpPr>
         <p:spPr>
           <a:xfrm>
-            <a:off x="406301" y="10991552"/>
+            <a:off x="406301" y="6665714"/>
+            <a:ext cx="8498026" cy="213271"/>
+          </a:xfrm>
+          <a:prstGeom prst="rect">
+            <a:avLst/>
+          </a:prstGeom>
+          <a:noFill/>
+          <a:ln/>
+        </p:spPr>
+        <p:txBody>
+          <a:bodyPr wrap="square" lIns="0" tIns="0" rIns="0" bIns="0" rtlCol="0" anchor="t"/>
+          <a:lstStyle/>
+          <a:p>
+            <a:pPr algn="l" indent="0" marL="0">
+              <a:lnSpc>
+                <a:spcPts val="1680"/>
+              </a:lnSpc>
+              <a:spcBef>
+                <a:spcPts val="300"/>
+              </a:spcBef>
+              <a:spcAft>
+                <a:spcPts val="300"/>
+              </a:spcAft>
+              <a:buNone/>
+            </a:pPr>
+            <a:r>
+              <a:rPr lang="en-US" sz="1200" i="1" dirty="0">
+                <a:solidFill>
+                  <a:srgbClr val="1C2833"/>
+                </a:solidFill>
+                <a:latin typeface="Arial" pitchFamily="34" charset="0"/>
+                <a:ea typeface="Arial" pitchFamily="34" charset="-122"/>
+                <a:cs typeface="Arial" pitchFamily="34" charset="-120"/>
+              </a:rPr>
+              <a:t>Each row: # · IAST · English (ordinal).</a:t>
+            </a:r>
+            <a:endParaRPr lang="en-US" sz="1200" dirty="0"/>
+          </a:p>
+        </p:txBody>
+      </p:sp>
+      <p:sp>
+        <p:nvSpPr>
+          <p:cNvPr id="22" name="Text 20"/>
+          <p:cNvSpPr/>
+          <p:nvPr/>
+        </p:nvSpPr>
+        <p:spPr>
+          <a:xfrm>
+            <a:off x="634901" y="6967835"/>
+            <a:ext cx="8102798" cy="3694807"/>
+          </a:xfrm>
+          <a:prstGeom prst="rect">
+            <a:avLst/>
+          </a:prstGeom>
+          <a:noFill/>
+          <a:ln/>
+        </p:spPr>
+        <p:txBody>
+          <a:bodyPr wrap="square" lIns="0" tIns="0" rIns="0" bIns="0" rtlCol="0" anchor="t"/>
+          <a:lstStyle/>
+          <a:p>
+            <a:pPr algn="l" marL="342900" indent="-342900">
+              <a:lnSpc>
+                <a:spcPts val="1620"/>
+              </a:lnSpc>
+              <a:spcAft>
+                <a:spcPts val="300"/>
+              </a:spcAft>
+              <a:buSzPct val="100000"/>
+              <a:buChar char="•"/>
+            </a:pPr>
+            <a:r>
+              <a:rPr lang="en-US" sz="1200" b="1" dirty="0">
+                <a:solidFill>
+                  <a:srgbClr val="1C2833"/>
+                </a:solidFill>
+                <a:latin typeface="Arial" pitchFamily="34" charset="0"/>
+                <a:ea typeface="Arial" pitchFamily="34" charset="-122"/>
+                <a:cs typeface="Arial" pitchFamily="34" charset="-120"/>
+              </a:rPr>
+              <a:t>1</a:t>
+            </a:r>
+            <a:pPr algn="l" indent="0" marL="0">
+              <a:lnSpc>
+                <a:spcPts val="1620"/>
+              </a:lnSpc>
+              <a:spcAft>
+                <a:spcPts val="300"/>
+              </a:spcAft>
+              <a:buNone/>
+            </a:pPr>
+            <a:r>
+              <a:rPr lang="en-US" sz="1200" dirty="0">
+                <a:solidFill>
+                  <a:srgbClr val="1C2833"/>
+                </a:solidFill>
+                <a:latin typeface="Arial" pitchFamily="34" charset="0"/>
+                <a:ea typeface="Arial" pitchFamily="34" charset="-122"/>
+                <a:cs typeface="Arial" pitchFamily="34" charset="-120"/>
+              </a:rPr>
+              <a:t> — </a:t>
+            </a:r>
+            <a:pPr algn="l" indent="0" marL="0">
+              <a:lnSpc>
+                <a:spcPts val="1620"/>
+              </a:lnSpc>
+              <a:spcAft>
+                <a:spcPts val="300"/>
+              </a:spcAft>
+              <a:buNone/>
+            </a:pPr>
+            <a:r>
+              <a:rPr lang="en-US" sz="1200" i="1" dirty="0">
+                <a:solidFill>
+                  <a:srgbClr val="1C2833"/>
+                </a:solidFill>
+                <a:latin typeface="Arial" pitchFamily="34" charset="0"/>
+                <a:ea typeface="Arial" pitchFamily="34" charset="-122"/>
+                <a:cs typeface="Arial" pitchFamily="34" charset="-120"/>
+              </a:rPr>
+              <a:t>pratipadā</a:t>
+            </a:r>
+            <a:pPr algn="l" indent="0" marL="0">
+              <a:lnSpc>
+                <a:spcPts val="1620"/>
+              </a:lnSpc>
+              <a:spcAft>
+                <a:spcPts val="300"/>
+              </a:spcAft>
+              <a:buNone/>
+            </a:pPr>
+            <a:r>
+              <a:rPr lang="en-US" sz="1200" dirty="0">
+                <a:solidFill>
+                  <a:srgbClr val="1C2833"/>
+                </a:solidFill>
+                <a:latin typeface="Arial" pitchFamily="34" charset="0"/>
+                <a:ea typeface="Arial" pitchFamily="34" charset="-122"/>
+                <a:cs typeface="Arial" pitchFamily="34" charset="-120"/>
+              </a:rPr>
+              <a:t> · "first"</a:t>
+            </a:r>
+            <a:endParaRPr lang="en-US" sz="1200" dirty="0"/>
+          </a:p>
+          <a:p>
+            <a:pPr algn="l" marL="342900" indent="-342900">
+              <a:lnSpc>
+                <a:spcPts val="1620"/>
+              </a:lnSpc>
+              <a:spcAft>
+                <a:spcPts val="300"/>
+              </a:spcAft>
+              <a:buSzPct val="100000"/>
+              <a:buChar char="•"/>
+            </a:pPr>
+            <a:r>
+              <a:rPr lang="en-US" sz="1200" b="1" dirty="0">
+                <a:solidFill>
+                  <a:srgbClr val="1C2833"/>
+                </a:solidFill>
+                <a:latin typeface="Arial" pitchFamily="34" charset="0"/>
+                <a:ea typeface="Arial" pitchFamily="34" charset="-122"/>
+                <a:cs typeface="Arial" pitchFamily="34" charset="-120"/>
+              </a:rPr>
+              <a:t>2</a:t>
+            </a:r>
+            <a:pPr algn="l" indent="0" marL="0">
+              <a:lnSpc>
+                <a:spcPts val="1620"/>
+              </a:lnSpc>
+              <a:spcAft>
+                <a:spcPts val="300"/>
+              </a:spcAft>
+              <a:buNone/>
+            </a:pPr>
+            <a:r>
+              <a:rPr lang="en-US" sz="1200" dirty="0">
+                <a:solidFill>
+                  <a:srgbClr val="1C2833"/>
+                </a:solidFill>
+                <a:latin typeface="Arial" pitchFamily="34" charset="0"/>
+                <a:ea typeface="Arial" pitchFamily="34" charset="-122"/>
+                <a:cs typeface="Arial" pitchFamily="34" charset="-120"/>
+              </a:rPr>
+              <a:t> — </a:t>
+            </a:r>
+            <a:pPr algn="l" indent="0" marL="0">
+              <a:lnSpc>
+                <a:spcPts val="1620"/>
+              </a:lnSpc>
+              <a:spcAft>
+                <a:spcPts val="300"/>
+              </a:spcAft>
+              <a:buNone/>
+            </a:pPr>
+            <a:r>
+              <a:rPr lang="en-US" sz="1200" i="1" dirty="0">
+                <a:solidFill>
+                  <a:srgbClr val="1C2833"/>
+                </a:solidFill>
+                <a:latin typeface="Arial" pitchFamily="34" charset="0"/>
+                <a:ea typeface="Arial" pitchFamily="34" charset="-122"/>
+                <a:cs typeface="Arial" pitchFamily="34" charset="-120"/>
+              </a:rPr>
+              <a:t>dvitīyā</a:t>
+            </a:r>
+            <a:pPr algn="l" indent="0" marL="0">
+              <a:lnSpc>
+                <a:spcPts val="1620"/>
+              </a:lnSpc>
+              <a:spcAft>
+                <a:spcPts val="300"/>
+              </a:spcAft>
+              <a:buNone/>
+            </a:pPr>
+            <a:r>
+              <a:rPr lang="en-US" sz="1200" dirty="0">
+                <a:solidFill>
+                  <a:srgbClr val="1C2833"/>
+                </a:solidFill>
+                <a:latin typeface="Arial" pitchFamily="34" charset="0"/>
+                <a:ea typeface="Arial" pitchFamily="34" charset="-122"/>
+                <a:cs typeface="Arial" pitchFamily="34" charset="-120"/>
+              </a:rPr>
+              <a:t> · "second"</a:t>
+            </a:r>
+            <a:endParaRPr lang="en-US" sz="1200" dirty="0"/>
+          </a:p>
+          <a:p>
+            <a:pPr algn="l" marL="342900" indent="-342900">
+              <a:lnSpc>
+                <a:spcPts val="1620"/>
+              </a:lnSpc>
+              <a:spcAft>
+                <a:spcPts val="300"/>
+              </a:spcAft>
+              <a:buSzPct val="100000"/>
+              <a:buChar char="•"/>
+            </a:pPr>
+            <a:r>
+              <a:rPr lang="en-US" sz="1200" b="1" dirty="0">
+                <a:solidFill>
+                  <a:srgbClr val="1C2833"/>
+                </a:solidFill>
+                <a:latin typeface="Arial" pitchFamily="34" charset="0"/>
+                <a:ea typeface="Arial" pitchFamily="34" charset="-122"/>
+                <a:cs typeface="Arial" pitchFamily="34" charset="-120"/>
+              </a:rPr>
+              <a:t>3</a:t>
+            </a:r>
+            <a:pPr algn="l" indent="0" marL="0">
+              <a:lnSpc>
+                <a:spcPts val="1620"/>
+              </a:lnSpc>
+              <a:spcAft>
+                <a:spcPts val="300"/>
+              </a:spcAft>
+              <a:buNone/>
+            </a:pPr>
+            <a:r>
+              <a:rPr lang="en-US" sz="1200" dirty="0">
+                <a:solidFill>
+                  <a:srgbClr val="1C2833"/>
+                </a:solidFill>
+                <a:latin typeface="Arial" pitchFamily="34" charset="0"/>
+                <a:ea typeface="Arial" pitchFamily="34" charset="-122"/>
+                <a:cs typeface="Arial" pitchFamily="34" charset="-120"/>
+              </a:rPr>
+              <a:t> — </a:t>
+            </a:r>
+            <a:pPr algn="l" indent="0" marL="0">
+              <a:lnSpc>
+                <a:spcPts val="1620"/>
+              </a:lnSpc>
+              <a:spcAft>
+                <a:spcPts val="300"/>
+              </a:spcAft>
+              <a:buNone/>
+            </a:pPr>
+            <a:r>
+              <a:rPr lang="en-US" sz="1200" i="1" dirty="0">
+                <a:solidFill>
+                  <a:srgbClr val="1C2833"/>
+                </a:solidFill>
+                <a:latin typeface="Arial" pitchFamily="34" charset="0"/>
+                <a:ea typeface="Arial" pitchFamily="34" charset="-122"/>
+                <a:cs typeface="Arial" pitchFamily="34" charset="-120"/>
+              </a:rPr>
+              <a:t>tṛtīyā</a:t>
+            </a:r>
+            <a:pPr algn="l" indent="0" marL="0">
+              <a:lnSpc>
+                <a:spcPts val="1620"/>
+              </a:lnSpc>
+              <a:spcAft>
+                <a:spcPts val="300"/>
+              </a:spcAft>
+              <a:buNone/>
+            </a:pPr>
+            <a:r>
+              <a:rPr lang="en-US" sz="1200" dirty="0">
+                <a:solidFill>
+                  <a:srgbClr val="1C2833"/>
+                </a:solidFill>
+                <a:latin typeface="Arial" pitchFamily="34" charset="0"/>
+                <a:ea typeface="Arial" pitchFamily="34" charset="-122"/>
+                <a:cs typeface="Arial" pitchFamily="34" charset="-120"/>
+              </a:rPr>
+              <a:t> · "third"</a:t>
+            </a:r>
+            <a:endParaRPr lang="en-US" sz="1200" dirty="0"/>
+          </a:p>
+          <a:p>
+            <a:pPr algn="l" marL="342900" indent="-342900">
+              <a:lnSpc>
+                <a:spcPts val="1620"/>
+              </a:lnSpc>
+              <a:spcAft>
+                <a:spcPts val="300"/>
+              </a:spcAft>
+              <a:buSzPct val="100000"/>
+              <a:buChar char="•"/>
+            </a:pPr>
+            <a:r>
+              <a:rPr lang="en-US" sz="1200" b="1" dirty="0">
+                <a:solidFill>
+                  <a:srgbClr val="1C2833"/>
+                </a:solidFill>
+                <a:latin typeface="Arial" pitchFamily="34" charset="0"/>
+                <a:ea typeface="Arial" pitchFamily="34" charset="-122"/>
+                <a:cs typeface="Arial" pitchFamily="34" charset="-120"/>
+              </a:rPr>
+              <a:t>4</a:t>
+            </a:r>
+            <a:pPr algn="l" indent="0" marL="0">
+              <a:lnSpc>
+                <a:spcPts val="1620"/>
+              </a:lnSpc>
+              <a:spcAft>
+                <a:spcPts val="300"/>
+              </a:spcAft>
+              <a:buNone/>
+            </a:pPr>
+            <a:r>
+              <a:rPr lang="en-US" sz="1200" dirty="0">
+                <a:solidFill>
+                  <a:srgbClr val="1C2833"/>
+                </a:solidFill>
+                <a:latin typeface="Arial" pitchFamily="34" charset="0"/>
+                <a:ea typeface="Arial" pitchFamily="34" charset="-122"/>
+                <a:cs typeface="Arial" pitchFamily="34" charset="-120"/>
+              </a:rPr>
+              <a:t> — </a:t>
+            </a:r>
+            <a:pPr algn="l" indent="0" marL="0">
+              <a:lnSpc>
+                <a:spcPts val="1620"/>
+              </a:lnSpc>
+              <a:spcAft>
+                <a:spcPts val="300"/>
+              </a:spcAft>
+              <a:buNone/>
+            </a:pPr>
+            <a:r>
+              <a:rPr lang="en-US" sz="1200" i="1" dirty="0">
+                <a:solidFill>
+                  <a:srgbClr val="1C2833"/>
+                </a:solidFill>
+                <a:latin typeface="Arial" pitchFamily="34" charset="0"/>
+                <a:ea typeface="Arial" pitchFamily="34" charset="-122"/>
+                <a:cs typeface="Arial" pitchFamily="34" charset="-120"/>
+              </a:rPr>
+              <a:t>caturthī</a:t>
+            </a:r>
+            <a:pPr algn="l" indent="0" marL="0">
+              <a:lnSpc>
+                <a:spcPts val="1620"/>
+              </a:lnSpc>
+              <a:spcAft>
+                <a:spcPts val="300"/>
+              </a:spcAft>
+              <a:buNone/>
+            </a:pPr>
+            <a:r>
+              <a:rPr lang="en-US" sz="1200" dirty="0">
+                <a:solidFill>
+                  <a:srgbClr val="1C2833"/>
+                </a:solidFill>
+                <a:latin typeface="Arial" pitchFamily="34" charset="0"/>
+                <a:ea typeface="Arial" pitchFamily="34" charset="-122"/>
+                <a:cs typeface="Arial" pitchFamily="34" charset="-120"/>
+              </a:rPr>
+              <a:t> · "fourth"</a:t>
+            </a:r>
+            <a:endParaRPr lang="en-US" sz="1200" dirty="0"/>
+          </a:p>
+          <a:p>
+            <a:pPr algn="l" marL="342900" indent="-342900">
+              <a:lnSpc>
+                <a:spcPts val="1620"/>
+              </a:lnSpc>
+              <a:spcAft>
+                <a:spcPts val="300"/>
+              </a:spcAft>
+              <a:buSzPct val="100000"/>
+              <a:buChar char="•"/>
+            </a:pPr>
+            <a:r>
+              <a:rPr lang="en-US" sz="1200" b="1" dirty="0">
+                <a:solidFill>
+                  <a:srgbClr val="1C2833"/>
+                </a:solidFill>
+                <a:latin typeface="Arial" pitchFamily="34" charset="0"/>
+                <a:ea typeface="Arial" pitchFamily="34" charset="-122"/>
+                <a:cs typeface="Arial" pitchFamily="34" charset="-120"/>
+              </a:rPr>
+              <a:t>5</a:t>
+            </a:r>
+            <a:pPr algn="l" indent="0" marL="0">
+              <a:lnSpc>
+                <a:spcPts val="1620"/>
+              </a:lnSpc>
+              <a:spcAft>
+                <a:spcPts val="300"/>
+              </a:spcAft>
+              <a:buNone/>
+            </a:pPr>
+            <a:r>
+              <a:rPr lang="en-US" sz="1200" dirty="0">
+                <a:solidFill>
+                  <a:srgbClr val="1C2833"/>
+                </a:solidFill>
+                <a:latin typeface="Arial" pitchFamily="34" charset="0"/>
+                <a:ea typeface="Arial" pitchFamily="34" charset="-122"/>
+                <a:cs typeface="Arial" pitchFamily="34" charset="-120"/>
+              </a:rPr>
+              <a:t> — </a:t>
+            </a:r>
+            <a:pPr algn="l" indent="0" marL="0">
+              <a:lnSpc>
+                <a:spcPts val="1620"/>
+              </a:lnSpc>
+              <a:spcAft>
+                <a:spcPts val="300"/>
+              </a:spcAft>
+              <a:buNone/>
+            </a:pPr>
+            <a:r>
+              <a:rPr lang="en-US" sz="1200" i="1" dirty="0">
+                <a:solidFill>
+                  <a:srgbClr val="1C2833"/>
+                </a:solidFill>
+                <a:latin typeface="Arial" pitchFamily="34" charset="0"/>
+                <a:ea typeface="Arial" pitchFamily="34" charset="-122"/>
+                <a:cs typeface="Arial" pitchFamily="34" charset="-120"/>
+              </a:rPr>
+              <a:t>pañcamī</a:t>
+            </a:r>
+            <a:pPr algn="l" indent="0" marL="0">
+              <a:lnSpc>
+                <a:spcPts val="1620"/>
+              </a:lnSpc>
+              <a:spcAft>
+                <a:spcPts val="300"/>
+              </a:spcAft>
+              <a:buNone/>
+            </a:pPr>
+            <a:r>
+              <a:rPr lang="en-US" sz="1200" dirty="0">
+                <a:solidFill>
+                  <a:srgbClr val="1C2833"/>
+                </a:solidFill>
+                <a:latin typeface="Arial" pitchFamily="34" charset="0"/>
+                <a:ea typeface="Arial" pitchFamily="34" charset="-122"/>
+                <a:cs typeface="Arial" pitchFamily="34" charset="-120"/>
+              </a:rPr>
+              <a:t> · "fifth"</a:t>
+            </a:r>
+            <a:endParaRPr lang="en-US" sz="1200" dirty="0"/>
+          </a:p>
+          <a:p>
+            <a:pPr algn="l" marL="342900" indent="-342900">
+              <a:lnSpc>
+                <a:spcPts val="1620"/>
+              </a:lnSpc>
+              <a:spcAft>
+                <a:spcPts val="300"/>
+              </a:spcAft>
+              <a:buSzPct val="100000"/>
+              <a:buChar char="•"/>
+            </a:pPr>
+            <a:r>
+              <a:rPr lang="en-US" sz="1200" b="1" dirty="0">
+                <a:solidFill>
+                  <a:srgbClr val="1C2833"/>
+                </a:solidFill>
+                <a:latin typeface="Arial" pitchFamily="34" charset="0"/>
+                <a:ea typeface="Arial" pitchFamily="34" charset="-122"/>
+                <a:cs typeface="Arial" pitchFamily="34" charset="-120"/>
+              </a:rPr>
+              <a:t>6</a:t>
+            </a:r>
+            <a:pPr algn="l" indent="0" marL="0">
+              <a:lnSpc>
+                <a:spcPts val="1620"/>
+              </a:lnSpc>
+              <a:spcAft>
+                <a:spcPts val="300"/>
+              </a:spcAft>
+              <a:buNone/>
+            </a:pPr>
+            <a:r>
+              <a:rPr lang="en-US" sz="1200" dirty="0">
+                <a:solidFill>
+                  <a:srgbClr val="1C2833"/>
+                </a:solidFill>
+                <a:latin typeface="Arial" pitchFamily="34" charset="0"/>
+                <a:ea typeface="Arial" pitchFamily="34" charset="-122"/>
+                <a:cs typeface="Arial" pitchFamily="34" charset="-120"/>
+              </a:rPr>
+              <a:t> — </a:t>
+            </a:r>
+            <a:pPr algn="l" indent="0" marL="0">
+              <a:lnSpc>
+                <a:spcPts val="1620"/>
+              </a:lnSpc>
+              <a:spcAft>
+                <a:spcPts val="300"/>
+              </a:spcAft>
+              <a:buNone/>
+            </a:pPr>
+            <a:r>
+              <a:rPr lang="en-US" sz="1200" i="1" dirty="0">
+                <a:solidFill>
+                  <a:srgbClr val="1C2833"/>
+                </a:solidFill>
+                <a:latin typeface="Arial" pitchFamily="34" charset="0"/>
+                <a:ea typeface="Arial" pitchFamily="34" charset="-122"/>
+                <a:cs typeface="Arial" pitchFamily="34" charset="-120"/>
+              </a:rPr>
+              <a:t>ṣaṣṭhī</a:t>
+            </a:r>
+            <a:pPr algn="l" indent="0" marL="0">
+              <a:lnSpc>
+                <a:spcPts val="1620"/>
+              </a:lnSpc>
+              <a:spcAft>
+                <a:spcPts val="300"/>
+              </a:spcAft>
+              <a:buNone/>
+            </a:pPr>
+            <a:r>
+              <a:rPr lang="en-US" sz="1200" dirty="0">
+                <a:solidFill>
+                  <a:srgbClr val="1C2833"/>
+                </a:solidFill>
+                <a:latin typeface="Arial" pitchFamily="34" charset="0"/>
+                <a:ea typeface="Arial" pitchFamily="34" charset="-122"/>
+                <a:cs typeface="Arial" pitchFamily="34" charset="-120"/>
+              </a:rPr>
+              <a:t> · "sixth"</a:t>
+            </a:r>
+            <a:endParaRPr lang="en-US" sz="1200" dirty="0"/>
+          </a:p>
+          <a:p>
+            <a:pPr algn="l" marL="342900" indent="-342900">
+              <a:lnSpc>
+                <a:spcPts val="1620"/>
+              </a:lnSpc>
+              <a:spcAft>
+                <a:spcPts val="300"/>
+              </a:spcAft>
+              <a:buSzPct val="100000"/>
+              <a:buChar char="•"/>
+            </a:pPr>
+            <a:r>
+              <a:rPr lang="en-US" sz="1200" b="1" dirty="0">
+                <a:solidFill>
+                  <a:srgbClr val="1C2833"/>
+                </a:solidFill>
+                <a:latin typeface="Arial" pitchFamily="34" charset="0"/>
+                <a:ea typeface="Arial" pitchFamily="34" charset="-122"/>
+                <a:cs typeface="Arial" pitchFamily="34" charset="-120"/>
+              </a:rPr>
+              <a:t>7</a:t>
+            </a:r>
+            <a:pPr algn="l" indent="0" marL="0">
+              <a:lnSpc>
+                <a:spcPts val="1620"/>
+              </a:lnSpc>
+              <a:spcAft>
+                <a:spcPts val="300"/>
+              </a:spcAft>
+              <a:buNone/>
+            </a:pPr>
+            <a:r>
+              <a:rPr lang="en-US" sz="1200" dirty="0">
+                <a:solidFill>
+                  <a:srgbClr val="1C2833"/>
+                </a:solidFill>
+                <a:latin typeface="Arial" pitchFamily="34" charset="0"/>
+                <a:ea typeface="Arial" pitchFamily="34" charset="-122"/>
+                <a:cs typeface="Arial" pitchFamily="34" charset="-120"/>
+              </a:rPr>
+              <a:t> — </a:t>
+            </a:r>
+            <a:pPr algn="l" indent="0" marL="0">
+              <a:lnSpc>
+                <a:spcPts val="1620"/>
+              </a:lnSpc>
+              <a:spcAft>
+                <a:spcPts val="300"/>
+              </a:spcAft>
+              <a:buNone/>
+            </a:pPr>
+            <a:r>
+              <a:rPr lang="en-US" sz="1200" i="1" dirty="0">
+                <a:solidFill>
+                  <a:srgbClr val="1C2833"/>
+                </a:solidFill>
+                <a:latin typeface="Arial" pitchFamily="34" charset="0"/>
+                <a:ea typeface="Arial" pitchFamily="34" charset="-122"/>
+                <a:cs typeface="Arial" pitchFamily="34" charset="-120"/>
+              </a:rPr>
+              <a:t>saptamī</a:t>
+            </a:r>
+            <a:pPr algn="l" indent="0" marL="0">
+              <a:lnSpc>
+                <a:spcPts val="1620"/>
+              </a:lnSpc>
+              <a:spcAft>
+                <a:spcPts val="300"/>
+              </a:spcAft>
+              <a:buNone/>
+            </a:pPr>
+            <a:r>
+              <a:rPr lang="en-US" sz="1200" dirty="0">
+                <a:solidFill>
+                  <a:srgbClr val="1C2833"/>
+                </a:solidFill>
+                <a:latin typeface="Arial" pitchFamily="34" charset="0"/>
+                <a:ea typeface="Arial" pitchFamily="34" charset="-122"/>
+                <a:cs typeface="Arial" pitchFamily="34" charset="-120"/>
+              </a:rPr>
+              <a:t> · "seventh"</a:t>
+            </a:r>
+            <a:endParaRPr lang="en-US" sz="1200" dirty="0"/>
+          </a:p>
+          <a:p>
+            <a:pPr algn="l" marL="342900" indent="-342900">
+              <a:lnSpc>
+                <a:spcPts val="1620"/>
+              </a:lnSpc>
+              <a:spcAft>
+                <a:spcPts val="300"/>
+              </a:spcAft>
+              <a:buSzPct val="100000"/>
+              <a:buChar char="•"/>
+            </a:pPr>
+            <a:r>
+              <a:rPr lang="en-US" sz="1200" b="1" dirty="0">
+                <a:solidFill>
+                  <a:srgbClr val="1C2833"/>
+                </a:solidFill>
+                <a:latin typeface="Arial" pitchFamily="34" charset="0"/>
+                <a:ea typeface="Arial" pitchFamily="34" charset="-122"/>
+                <a:cs typeface="Arial" pitchFamily="34" charset="-120"/>
+              </a:rPr>
+              <a:t>8</a:t>
+            </a:r>
+            <a:pPr algn="l" indent="0" marL="0">
+              <a:lnSpc>
+                <a:spcPts val="1620"/>
+              </a:lnSpc>
+              <a:spcAft>
+                <a:spcPts val="300"/>
+              </a:spcAft>
+              <a:buNone/>
+            </a:pPr>
+            <a:r>
+              <a:rPr lang="en-US" sz="1200" dirty="0">
+                <a:solidFill>
+                  <a:srgbClr val="1C2833"/>
+                </a:solidFill>
+                <a:latin typeface="Arial" pitchFamily="34" charset="0"/>
+                <a:ea typeface="Arial" pitchFamily="34" charset="-122"/>
+                <a:cs typeface="Arial" pitchFamily="34" charset="-120"/>
+              </a:rPr>
+              <a:t> — </a:t>
+            </a:r>
+            <a:pPr algn="l" indent="0" marL="0">
+              <a:lnSpc>
+                <a:spcPts val="1620"/>
+              </a:lnSpc>
+              <a:spcAft>
+                <a:spcPts val="300"/>
+              </a:spcAft>
+              <a:buNone/>
+            </a:pPr>
+            <a:r>
+              <a:rPr lang="en-US" sz="1200" i="1" dirty="0">
+                <a:solidFill>
+                  <a:srgbClr val="1C2833"/>
+                </a:solidFill>
+                <a:latin typeface="Arial" pitchFamily="34" charset="0"/>
+                <a:ea typeface="Arial" pitchFamily="34" charset="-122"/>
+                <a:cs typeface="Arial" pitchFamily="34" charset="-120"/>
+              </a:rPr>
+              <a:t>aṣṭamī</a:t>
+            </a:r>
+            <a:pPr algn="l" indent="0" marL="0">
+              <a:lnSpc>
+                <a:spcPts val="1620"/>
+              </a:lnSpc>
+              <a:spcAft>
+                <a:spcPts val="300"/>
+              </a:spcAft>
+              <a:buNone/>
+            </a:pPr>
+            <a:r>
+              <a:rPr lang="en-US" sz="1200" dirty="0">
+                <a:solidFill>
+                  <a:srgbClr val="1C2833"/>
+                </a:solidFill>
+                <a:latin typeface="Arial" pitchFamily="34" charset="0"/>
+                <a:ea typeface="Arial" pitchFamily="34" charset="-122"/>
+                <a:cs typeface="Arial" pitchFamily="34" charset="-120"/>
+              </a:rPr>
+              <a:t> · "eighth"</a:t>
+            </a:r>
+            <a:endParaRPr lang="en-US" sz="1200" dirty="0"/>
+          </a:p>
+          <a:p>
+            <a:pPr algn="l" marL="342900" indent="-342900">
+              <a:lnSpc>
+                <a:spcPts val="1620"/>
+              </a:lnSpc>
+              <a:spcAft>
+                <a:spcPts val="300"/>
+              </a:spcAft>
+              <a:buSzPct val="100000"/>
+              <a:buChar char="•"/>
+            </a:pPr>
+            <a:r>
+              <a:rPr lang="en-US" sz="1200" b="1" dirty="0">
+                <a:solidFill>
+                  <a:srgbClr val="1C2833"/>
+                </a:solidFill>
+                <a:latin typeface="Arial" pitchFamily="34" charset="0"/>
+                <a:ea typeface="Arial" pitchFamily="34" charset="-122"/>
+                <a:cs typeface="Arial" pitchFamily="34" charset="-120"/>
+              </a:rPr>
+              <a:t>9</a:t>
+            </a:r>
+            <a:pPr algn="l" indent="0" marL="0">
+              <a:lnSpc>
+                <a:spcPts val="1620"/>
+              </a:lnSpc>
+              <a:spcAft>
+                <a:spcPts val="300"/>
+              </a:spcAft>
+              <a:buNone/>
+            </a:pPr>
+            <a:r>
+              <a:rPr lang="en-US" sz="1200" dirty="0">
+                <a:solidFill>
+                  <a:srgbClr val="1C2833"/>
+                </a:solidFill>
+                <a:latin typeface="Arial" pitchFamily="34" charset="0"/>
+                <a:ea typeface="Arial" pitchFamily="34" charset="-122"/>
+                <a:cs typeface="Arial" pitchFamily="34" charset="-120"/>
+              </a:rPr>
+              <a:t> — </a:t>
+            </a:r>
+            <a:pPr algn="l" indent="0" marL="0">
+              <a:lnSpc>
+                <a:spcPts val="1620"/>
+              </a:lnSpc>
+              <a:spcAft>
+                <a:spcPts val="300"/>
+              </a:spcAft>
+              <a:buNone/>
+            </a:pPr>
+            <a:r>
+              <a:rPr lang="en-US" sz="1200" i="1" dirty="0">
+                <a:solidFill>
+                  <a:srgbClr val="1C2833"/>
+                </a:solidFill>
+                <a:latin typeface="Arial" pitchFamily="34" charset="0"/>
+                <a:ea typeface="Arial" pitchFamily="34" charset="-122"/>
+                <a:cs typeface="Arial" pitchFamily="34" charset="-120"/>
+              </a:rPr>
+              <a:t>navamī</a:t>
+            </a:r>
+            <a:pPr algn="l" indent="0" marL="0">
+              <a:lnSpc>
+                <a:spcPts val="1620"/>
+              </a:lnSpc>
+              <a:spcAft>
+                <a:spcPts val="300"/>
+              </a:spcAft>
+              <a:buNone/>
+            </a:pPr>
+            <a:r>
+              <a:rPr lang="en-US" sz="1200" dirty="0">
+                <a:solidFill>
+                  <a:srgbClr val="1C2833"/>
+                </a:solidFill>
+                <a:latin typeface="Arial" pitchFamily="34" charset="0"/>
+                <a:ea typeface="Arial" pitchFamily="34" charset="-122"/>
+                <a:cs typeface="Arial" pitchFamily="34" charset="-120"/>
+              </a:rPr>
+              <a:t> · "ninth"</a:t>
+            </a:r>
+            <a:endParaRPr lang="en-US" sz="1200" dirty="0"/>
+          </a:p>
+          <a:p>
+            <a:pPr algn="l" marL="342900" indent="-342900">
+              <a:lnSpc>
+                <a:spcPts val="1620"/>
+              </a:lnSpc>
+              <a:spcAft>
+                <a:spcPts val="300"/>
+              </a:spcAft>
+              <a:buSzPct val="100000"/>
+              <a:buChar char="•"/>
+            </a:pPr>
+            <a:r>
+              <a:rPr lang="en-US" sz="1200" b="1" dirty="0">
+                <a:solidFill>
+                  <a:srgbClr val="1C2833"/>
+                </a:solidFill>
+                <a:latin typeface="Arial" pitchFamily="34" charset="0"/>
+                <a:ea typeface="Arial" pitchFamily="34" charset="-122"/>
+                <a:cs typeface="Arial" pitchFamily="34" charset="-120"/>
+              </a:rPr>
+              <a:t>10</a:t>
+            </a:r>
+            <a:pPr algn="l" indent="0" marL="0">
+              <a:lnSpc>
+                <a:spcPts val="1620"/>
+              </a:lnSpc>
+              <a:spcAft>
+                <a:spcPts val="300"/>
+              </a:spcAft>
+              <a:buNone/>
+            </a:pPr>
+            <a:r>
+              <a:rPr lang="en-US" sz="1200" dirty="0">
+                <a:solidFill>
+                  <a:srgbClr val="1C2833"/>
+                </a:solidFill>
+                <a:latin typeface="Arial" pitchFamily="34" charset="0"/>
+                <a:ea typeface="Arial" pitchFamily="34" charset="-122"/>
+                <a:cs typeface="Arial" pitchFamily="34" charset="-120"/>
+              </a:rPr>
+              <a:t> — </a:t>
+            </a:r>
+            <a:pPr algn="l" indent="0" marL="0">
+              <a:lnSpc>
+                <a:spcPts val="1620"/>
+              </a:lnSpc>
+              <a:spcAft>
+                <a:spcPts val="300"/>
+              </a:spcAft>
+              <a:buNone/>
+            </a:pPr>
+            <a:r>
+              <a:rPr lang="en-US" sz="1200" i="1" dirty="0">
+                <a:solidFill>
+                  <a:srgbClr val="1C2833"/>
+                </a:solidFill>
+                <a:latin typeface="Arial" pitchFamily="34" charset="0"/>
+                <a:ea typeface="Arial" pitchFamily="34" charset="-122"/>
+                <a:cs typeface="Arial" pitchFamily="34" charset="-120"/>
+              </a:rPr>
+              <a:t>daśamī</a:t>
+            </a:r>
+            <a:pPr algn="l" indent="0" marL="0">
+              <a:lnSpc>
+                <a:spcPts val="1620"/>
+              </a:lnSpc>
+              <a:spcAft>
+                <a:spcPts val="300"/>
+              </a:spcAft>
+              <a:buNone/>
+            </a:pPr>
+            <a:r>
+              <a:rPr lang="en-US" sz="1200" dirty="0">
+                <a:solidFill>
+                  <a:srgbClr val="1C2833"/>
+                </a:solidFill>
+                <a:latin typeface="Arial" pitchFamily="34" charset="0"/>
+                <a:ea typeface="Arial" pitchFamily="34" charset="-122"/>
+                <a:cs typeface="Arial" pitchFamily="34" charset="-120"/>
+              </a:rPr>
+              <a:t> · "tenth"</a:t>
+            </a:r>
+            <a:endParaRPr lang="en-US" sz="1200" dirty="0"/>
+          </a:p>
+          <a:p>
+            <a:pPr algn="l" marL="342900" indent="-342900">
+              <a:lnSpc>
+                <a:spcPts val="1620"/>
+              </a:lnSpc>
+              <a:spcAft>
+                <a:spcPts val="300"/>
+              </a:spcAft>
+              <a:buSzPct val="100000"/>
+              <a:buChar char="•"/>
+            </a:pPr>
+            <a:r>
+              <a:rPr lang="en-US" sz="1200" b="1" dirty="0">
+                <a:solidFill>
+                  <a:srgbClr val="1C2833"/>
+                </a:solidFill>
+                <a:latin typeface="Arial" pitchFamily="34" charset="0"/>
+                <a:ea typeface="Arial" pitchFamily="34" charset="-122"/>
+                <a:cs typeface="Arial" pitchFamily="34" charset="-120"/>
+              </a:rPr>
+              <a:t>11</a:t>
+            </a:r>
+            <a:pPr algn="l" indent="0" marL="0">
+              <a:lnSpc>
+                <a:spcPts val="1620"/>
+              </a:lnSpc>
+              <a:spcAft>
+                <a:spcPts val="300"/>
+              </a:spcAft>
+              <a:buNone/>
+            </a:pPr>
+            <a:r>
+              <a:rPr lang="en-US" sz="1200" dirty="0">
+                <a:solidFill>
+                  <a:srgbClr val="1C2833"/>
+                </a:solidFill>
+                <a:latin typeface="Arial" pitchFamily="34" charset="0"/>
+                <a:ea typeface="Arial" pitchFamily="34" charset="-122"/>
+                <a:cs typeface="Arial" pitchFamily="34" charset="-120"/>
+              </a:rPr>
+              <a:t> — </a:t>
+            </a:r>
+            <a:pPr algn="l" indent="0" marL="0">
+              <a:lnSpc>
+                <a:spcPts val="1620"/>
+              </a:lnSpc>
+              <a:spcAft>
+                <a:spcPts val="300"/>
+              </a:spcAft>
+              <a:buNone/>
+            </a:pPr>
+            <a:r>
+              <a:rPr lang="en-US" sz="1200" i="1" dirty="0">
+                <a:solidFill>
+                  <a:srgbClr val="1C2833"/>
+                </a:solidFill>
+                <a:latin typeface="Arial" pitchFamily="34" charset="0"/>
+                <a:ea typeface="Arial" pitchFamily="34" charset="-122"/>
+                <a:cs typeface="Arial" pitchFamily="34" charset="-120"/>
+              </a:rPr>
+              <a:t>ekādaśī</a:t>
+            </a:r>
+            <a:pPr algn="l" indent="0" marL="0">
+              <a:lnSpc>
+                <a:spcPts val="1620"/>
+              </a:lnSpc>
+              <a:spcAft>
+                <a:spcPts val="300"/>
+              </a:spcAft>
+              <a:buNone/>
+            </a:pPr>
+            <a:r>
+              <a:rPr lang="en-US" sz="1200" dirty="0">
+                <a:solidFill>
+                  <a:srgbClr val="1C2833"/>
+                </a:solidFill>
+                <a:latin typeface="Arial" pitchFamily="34" charset="0"/>
+                <a:ea typeface="Arial" pitchFamily="34" charset="-122"/>
+                <a:cs typeface="Arial" pitchFamily="34" charset="-120"/>
+              </a:rPr>
+              <a:t> · "eleventh"</a:t>
+            </a:r>
+            <a:endParaRPr lang="en-US" sz="1200" dirty="0"/>
+          </a:p>
+          <a:p>
+            <a:pPr algn="l" marL="342900" indent="-342900">
+              <a:lnSpc>
+                <a:spcPts val="1620"/>
+              </a:lnSpc>
+              <a:spcAft>
+                <a:spcPts val="300"/>
+              </a:spcAft>
+              <a:buSzPct val="100000"/>
+              <a:buChar char="•"/>
+            </a:pPr>
+            <a:r>
+              <a:rPr lang="en-US" sz="1200" b="1" dirty="0">
+                <a:solidFill>
+                  <a:srgbClr val="1C2833"/>
+                </a:solidFill>
+                <a:latin typeface="Arial" pitchFamily="34" charset="0"/>
+                <a:ea typeface="Arial" pitchFamily="34" charset="-122"/>
+                <a:cs typeface="Arial" pitchFamily="34" charset="-120"/>
+              </a:rPr>
+              <a:t>12</a:t>
+            </a:r>
+            <a:pPr algn="l" indent="0" marL="0">
+              <a:lnSpc>
+                <a:spcPts val="1620"/>
+              </a:lnSpc>
+              <a:spcAft>
+                <a:spcPts val="300"/>
+              </a:spcAft>
+              <a:buNone/>
+            </a:pPr>
+            <a:r>
+              <a:rPr lang="en-US" sz="1200" dirty="0">
+                <a:solidFill>
+                  <a:srgbClr val="1C2833"/>
+                </a:solidFill>
+                <a:latin typeface="Arial" pitchFamily="34" charset="0"/>
+                <a:ea typeface="Arial" pitchFamily="34" charset="-122"/>
+                <a:cs typeface="Arial" pitchFamily="34" charset="-120"/>
+              </a:rPr>
+              <a:t> — </a:t>
+            </a:r>
+            <a:pPr algn="l" indent="0" marL="0">
+              <a:lnSpc>
+                <a:spcPts val="1620"/>
+              </a:lnSpc>
+              <a:spcAft>
+                <a:spcPts val="300"/>
+              </a:spcAft>
+              <a:buNone/>
+            </a:pPr>
+            <a:r>
+              <a:rPr lang="en-US" sz="1200" i="1" dirty="0">
+                <a:solidFill>
+                  <a:srgbClr val="1C2833"/>
+                </a:solidFill>
+                <a:latin typeface="Arial" pitchFamily="34" charset="0"/>
+                <a:ea typeface="Arial" pitchFamily="34" charset="-122"/>
+                <a:cs typeface="Arial" pitchFamily="34" charset="-120"/>
+              </a:rPr>
+              <a:t>dvādaśī</a:t>
+            </a:r>
+            <a:pPr algn="l" indent="0" marL="0">
+              <a:lnSpc>
+                <a:spcPts val="1620"/>
+              </a:lnSpc>
+              <a:spcAft>
+                <a:spcPts val="300"/>
+              </a:spcAft>
+              <a:buNone/>
+            </a:pPr>
+            <a:r>
+              <a:rPr lang="en-US" sz="1200" dirty="0">
+                <a:solidFill>
+                  <a:srgbClr val="1C2833"/>
+                </a:solidFill>
+                <a:latin typeface="Arial" pitchFamily="34" charset="0"/>
+                <a:ea typeface="Arial" pitchFamily="34" charset="-122"/>
+                <a:cs typeface="Arial" pitchFamily="34" charset="-120"/>
+              </a:rPr>
+              <a:t> · "twelfth"</a:t>
+            </a:r>
+            <a:endParaRPr lang="en-US" sz="1200" dirty="0"/>
+          </a:p>
+          <a:p>
+            <a:pPr algn="l" marL="342900" indent="-342900">
+              <a:lnSpc>
+                <a:spcPts val="1620"/>
+              </a:lnSpc>
+              <a:spcAft>
+                <a:spcPts val="300"/>
+              </a:spcAft>
+              <a:buSzPct val="100000"/>
+              <a:buChar char="•"/>
+            </a:pPr>
+            <a:r>
+              <a:rPr lang="en-US" sz="1200" b="1" dirty="0">
+                <a:solidFill>
+                  <a:srgbClr val="1C2833"/>
+                </a:solidFill>
+                <a:latin typeface="Arial" pitchFamily="34" charset="0"/>
+                <a:ea typeface="Arial" pitchFamily="34" charset="-122"/>
+                <a:cs typeface="Arial" pitchFamily="34" charset="-120"/>
+              </a:rPr>
+              <a:t>13</a:t>
+            </a:r>
+            <a:pPr algn="l" indent="0" marL="0">
+              <a:lnSpc>
+                <a:spcPts val="1620"/>
+              </a:lnSpc>
+              <a:spcAft>
+                <a:spcPts val="300"/>
+              </a:spcAft>
+              <a:buNone/>
+            </a:pPr>
+            <a:r>
+              <a:rPr lang="en-US" sz="1200" dirty="0">
+                <a:solidFill>
+                  <a:srgbClr val="1C2833"/>
+                </a:solidFill>
+                <a:latin typeface="Arial" pitchFamily="34" charset="0"/>
+                <a:ea typeface="Arial" pitchFamily="34" charset="-122"/>
+                <a:cs typeface="Arial" pitchFamily="34" charset="-120"/>
+              </a:rPr>
+              <a:t> — </a:t>
+            </a:r>
+            <a:pPr algn="l" indent="0" marL="0">
+              <a:lnSpc>
+                <a:spcPts val="1620"/>
+              </a:lnSpc>
+              <a:spcAft>
+                <a:spcPts val="300"/>
+              </a:spcAft>
+              <a:buNone/>
+            </a:pPr>
+            <a:r>
+              <a:rPr lang="en-US" sz="1200" i="1" dirty="0">
+                <a:solidFill>
+                  <a:srgbClr val="1C2833"/>
+                </a:solidFill>
+                <a:latin typeface="Arial" pitchFamily="34" charset="0"/>
+                <a:ea typeface="Arial" pitchFamily="34" charset="-122"/>
+                <a:cs typeface="Arial" pitchFamily="34" charset="-120"/>
+              </a:rPr>
+              <a:t>trayodaśī</a:t>
+            </a:r>
+            <a:pPr algn="l" indent="0" marL="0">
+              <a:lnSpc>
+                <a:spcPts val="1620"/>
+              </a:lnSpc>
+              <a:spcAft>
+                <a:spcPts val="300"/>
+              </a:spcAft>
+              <a:buNone/>
+            </a:pPr>
+            <a:r>
+              <a:rPr lang="en-US" sz="1200" dirty="0">
+                <a:solidFill>
+                  <a:srgbClr val="1C2833"/>
+                </a:solidFill>
+                <a:latin typeface="Arial" pitchFamily="34" charset="0"/>
+                <a:ea typeface="Arial" pitchFamily="34" charset="-122"/>
+                <a:cs typeface="Arial" pitchFamily="34" charset="-120"/>
+              </a:rPr>
+              <a:t> · "thirteenth"</a:t>
+            </a:r>
+            <a:endParaRPr lang="en-US" sz="1200" dirty="0"/>
+          </a:p>
+          <a:p>
+            <a:pPr algn="l" marL="342900" indent="-342900">
+              <a:lnSpc>
+                <a:spcPts val="1620"/>
+              </a:lnSpc>
+              <a:spcAft>
+                <a:spcPts val="300"/>
+              </a:spcAft>
+              <a:buSzPct val="100000"/>
+              <a:buChar char="•"/>
+            </a:pPr>
+            <a:r>
+              <a:rPr lang="en-US" sz="1200" b="1" dirty="0">
+                <a:solidFill>
+                  <a:srgbClr val="1C2833"/>
+                </a:solidFill>
+                <a:latin typeface="Arial" pitchFamily="34" charset="0"/>
+                <a:ea typeface="Arial" pitchFamily="34" charset="-122"/>
+                <a:cs typeface="Arial" pitchFamily="34" charset="-120"/>
+              </a:rPr>
+              <a:t>14</a:t>
+            </a:r>
+            <a:pPr algn="l" indent="0" marL="0">
+              <a:lnSpc>
+                <a:spcPts val="1620"/>
+              </a:lnSpc>
+              <a:spcAft>
+                <a:spcPts val="300"/>
+              </a:spcAft>
+              <a:buNone/>
+            </a:pPr>
+            <a:r>
+              <a:rPr lang="en-US" sz="1200" dirty="0">
+                <a:solidFill>
+                  <a:srgbClr val="1C2833"/>
+                </a:solidFill>
+                <a:latin typeface="Arial" pitchFamily="34" charset="0"/>
+                <a:ea typeface="Arial" pitchFamily="34" charset="-122"/>
+                <a:cs typeface="Arial" pitchFamily="34" charset="-120"/>
+              </a:rPr>
+              <a:t> — </a:t>
+            </a:r>
+            <a:pPr algn="l" indent="0" marL="0">
+              <a:lnSpc>
+                <a:spcPts val="1620"/>
+              </a:lnSpc>
+              <a:spcAft>
+                <a:spcPts val="300"/>
+              </a:spcAft>
+              <a:buNone/>
+            </a:pPr>
+            <a:r>
+              <a:rPr lang="en-US" sz="1200" i="1" dirty="0">
+                <a:solidFill>
+                  <a:srgbClr val="1C2833"/>
+                </a:solidFill>
+                <a:latin typeface="Arial" pitchFamily="34" charset="0"/>
+                <a:ea typeface="Arial" pitchFamily="34" charset="-122"/>
+                <a:cs typeface="Arial" pitchFamily="34" charset="-120"/>
+              </a:rPr>
+              <a:t>caturdaśī</a:t>
+            </a:r>
+            <a:pPr algn="l" indent="0" marL="0">
+              <a:lnSpc>
+                <a:spcPts val="1620"/>
+              </a:lnSpc>
+              <a:spcAft>
+                <a:spcPts val="300"/>
+              </a:spcAft>
+              <a:buNone/>
+            </a:pPr>
+            <a:r>
+              <a:rPr lang="en-US" sz="1200" dirty="0">
+                <a:solidFill>
+                  <a:srgbClr val="1C2833"/>
+                </a:solidFill>
+                <a:latin typeface="Arial" pitchFamily="34" charset="0"/>
+                <a:ea typeface="Arial" pitchFamily="34" charset="-122"/>
+                <a:cs typeface="Arial" pitchFamily="34" charset="-120"/>
+              </a:rPr>
+              <a:t> · "fourteenth"</a:t>
+            </a:r>
+            <a:endParaRPr lang="en-US" sz="1200" dirty="0"/>
+          </a:p>
+          <a:p>
+            <a:pPr algn="l" marL="342900" indent="-342900">
+              <a:lnSpc>
+                <a:spcPts val="1620"/>
+              </a:lnSpc>
+              <a:spcAft>
+                <a:spcPts val="300"/>
+              </a:spcAft>
+              <a:buSzPct val="100000"/>
+              <a:buChar char="•"/>
+            </a:pPr>
+            <a:r>
+              <a:rPr lang="en-US" sz="1200" b="1" dirty="0">
+                <a:solidFill>
+                  <a:srgbClr val="1C2833"/>
+                </a:solidFill>
+                <a:latin typeface="Arial" pitchFamily="34" charset="0"/>
+                <a:ea typeface="Arial" pitchFamily="34" charset="-122"/>
+                <a:cs typeface="Arial" pitchFamily="34" charset="-120"/>
+              </a:rPr>
+              <a:t>15</a:t>
+            </a:r>
+            <a:pPr algn="l" indent="0" marL="0">
+              <a:lnSpc>
+                <a:spcPts val="1620"/>
+              </a:lnSpc>
+              <a:spcAft>
+                <a:spcPts val="300"/>
+              </a:spcAft>
+              <a:buNone/>
+            </a:pPr>
+            <a:r>
+              <a:rPr lang="en-US" sz="1200" dirty="0">
+                <a:solidFill>
+                  <a:srgbClr val="1C2833"/>
+                </a:solidFill>
+                <a:latin typeface="Arial" pitchFamily="34" charset="0"/>
+                <a:ea typeface="Arial" pitchFamily="34" charset="-122"/>
+                <a:cs typeface="Arial" pitchFamily="34" charset="-120"/>
+              </a:rPr>
+              <a:t> — </a:t>
+            </a:r>
+            <a:pPr algn="l" indent="0" marL="0">
+              <a:lnSpc>
+                <a:spcPts val="1620"/>
+              </a:lnSpc>
+              <a:spcAft>
+                <a:spcPts val="300"/>
+              </a:spcAft>
+              <a:buNone/>
+            </a:pPr>
+            <a:r>
+              <a:rPr lang="en-US" sz="1200" i="1" dirty="0">
+                <a:solidFill>
+                  <a:srgbClr val="1C2833"/>
+                </a:solidFill>
+                <a:latin typeface="Arial" pitchFamily="34" charset="0"/>
+                <a:ea typeface="Arial" pitchFamily="34" charset="-122"/>
+                <a:cs typeface="Arial" pitchFamily="34" charset="-120"/>
+              </a:rPr>
+              <a:t>pūrṇimā</a:t>
+            </a:r>
+            <a:pPr algn="l" indent="0" marL="0">
+              <a:lnSpc>
+                <a:spcPts val="1620"/>
+              </a:lnSpc>
+              <a:spcAft>
+                <a:spcPts val="300"/>
+              </a:spcAft>
+              <a:buNone/>
+            </a:pPr>
+            <a:r>
+              <a:rPr lang="en-US" sz="1200" dirty="0">
+                <a:solidFill>
+                  <a:srgbClr val="1C2833"/>
+                </a:solidFill>
+                <a:latin typeface="Arial" pitchFamily="34" charset="0"/>
+                <a:ea typeface="Arial" pitchFamily="34" charset="-122"/>
+                <a:cs typeface="Arial" pitchFamily="34" charset="-120"/>
+              </a:rPr>
+              <a:t> (or </a:t>
+            </a:r>
+            <a:pPr algn="l" indent="0" marL="0">
+              <a:lnSpc>
+                <a:spcPts val="1620"/>
+              </a:lnSpc>
+              <a:spcAft>
+                <a:spcPts val="300"/>
+              </a:spcAft>
+              <a:buNone/>
+            </a:pPr>
+            <a:r>
+              <a:rPr lang="en-US" sz="1200" i="1" dirty="0">
+                <a:solidFill>
+                  <a:srgbClr val="1C2833"/>
+                </a:solidFill>
+                <a:latin typeface="Arial" pitchFamily="34" charset="0"/>
+                <a:ea typeface="Arial" pitchFamily="34" charset="-122"/>
+                <a:cs typeface="Arial" pitchFamily="34" charset="-120"/>
+              </a:rPr>
+              <a:t>amāvasyā</a:t>
+            </a:r>
+            <a:pPr algn="l" indent="0" marL="0">
+              <a:lnSpc>
+                <a:spcPts val="1620"/>
+              </a:lnSpc>
+              <a:spcAft>
+                <a:spcPts val="300"/>
+              </a:spcAft>
+              <a:buNone/>
+            </a:pPr>
+            <a:r>
+              <a:rPr lang="en-US" sz="1200" dirty="0">
+                <a:solidFill>
+                  <a:srgbClr val="1C2833"/>
+                </a:solidFill>
+                <a:latin typeface="Arial" pitchFamily="34" charset="0"/>
+                <a:ea typeface="Arial" pitchFamily="34" charset="-122"/>
+                <a:cs typeface="Arial" pitchFamily="34" charset="-120"/>
+              </a:rPr>
+              <a:t>) · full / new moon</a:t>
+            </a:r>
+            <a:endParaRPr lang="en-US" sz="1200" dirty="0"/>
+          </a:p>
+        </p:txBody>
+      </p:sp>
+      <p:sp>
+        <p:nvSpPr>
+          <p:cNvPr id="23" name="Text 21"/>
+          <p:cNvSpPr/>
+          <p:nvPr/>
+        </p:nvSpPr>
+        <p:spPr>
+          <a:xfrm>
+            <a:off x="406301" y="10751493"/>
             <a:ext cx="8498026" cy="426541"/>
           </a:xfrm>
           <a:prstGeom prst="rect">
@@ -6109,13 +7479,13 @@
       </p:sp>
       <p:sp>
         <p:nvSpPr>
-          <p:cNvPr id="22" name="Text 20"/>
+          <p:cNvPr id="24" name="Text 22"/>
           <p:cNvSpPr/>
           <p:nvPr/>
         </p:nvSpPr>
         <p:spPr>
           <a:xfrm>
-            <a:off x="634901" y="11506944"/>
+            <a:off x="634901" y="11266884"/>
             <a:ext cx="8102798" cy="487561"/>
           </a:xfrm>
           <a:prstGeom prst="rect">
@@ -6215,13 +7585,13 @@
       </p:sp>
       <p:sp>
         <p:nvSpPr>
-          <p:cNvPr id="23" name="Text 21"/>
+          <p:cNvPr id="25" name="Text 23"/>
           <p:cNvSpPr/>
           <p:nvPr/>
         </p:nvSpPr>
         <p:spPr>
           <a:xfrm>
-            <a:off x="406301" y="12159555"/>
+            <a:off x="406301" y="11919496"/>
             <a:ext cx="8498026" cy="213271"/>
           </a:xfrm>
           <a:prstGeom prst="rect">
